--- a/slides/S7_slides.pptx
+++ b/slides/S7_slides.pptx
@@ -3131,7 +3131,7 @@
         <p:spPr>
           <a:xfrm>
             <a:off x="822960" y="2468880"/>
-            <a:ext cx="10545775" cy="1280160"/>
+            <a:ext cx="10545775" cy="1422400"/>
           </a:xfrm>
           <a:prstGeom prst="rect">
             <a:avLst/>
@@ -3185,7 +3185,7 @@
         </p:nvSpPr>
         <p:spPr>
           <a:xfrm>
-            <a:off x="822960" y="3657600"/>
+            <a:off x="822960" y="4119880"/>
             <a:ext cx="10545775" cy="914400"/>
           </a:xfrm>
           <a:prstGeom prst="rect">
@@ -3295,7 +3295,7 @@
         <p:spPr>
           <a:xfrm>
             <a:off x="822960" y="1188720"/>
-            <a:ext cx="10545775" cy="1645920"/>
+            <a:ext cx="10545775" cy="858520"/>
           </a:xfrm>
           <a:prstGeom prst="rect">
             <a:avLst/>
@@ -3349,8 +3349,8 @@
         </p:nvSpPr>
         <p:spPr>
           <a:xfrm>
-            <a:off x="822960" y="2834640"/>
-            <a:ext cx="10545775" cy="2194560"/>
+            <a:off x="822960" y="2367280"/>
+            <a:ext cx="10545775" cy="916940"/>
           </a:xfrm>
           <a:prstGeom prst="rect">
             <a:avLst/>
@@ -3404,7 +3404,7 @@
         </p:nvSpPr>
         <p:spPr>
           <a:xfrm>
-            <a:off x="822960" y="4572000"/>
+            <a:off x="822960" y="3558540"/>
             <a:ext cx="10545775" cy="1280160"/>
           </a:xfrm>
           <a:prstGeom prst="rect">
@@ -3446,7 +3446,7 @@
                 </a:solidFill>
                 <a:latin typeface="Menlo"/>
               </a:rPr>
-              <a:t>HSPA5  PDIA4  PDIA6  HSP90B1  HYOU1  UBXN10</a:t>
+              <a:t>DNAJA1  HSPA2  HSPA4  HSP90AA1  HSPB1  SERPINH1</a:t>
             </a:r>
           </a:p>
         </p:txBody>
@@ -3834,7 +3834,7 @@
         <p:spPr>
           <a:xfrm>
             <a:off x="822960" y="1188720"/>
-            <a:ext cx="10545775" cy="1645920"/>
+            <a:ext cx="10545775" cy="429260"/>
           </a:xfrm>
           <a:prstGeom prst="rect">
             <a:avLst/>
@@ -3872,8 +3872,8 @@
         </p:nvSpPr>
         <p:spPr>
           <a:xfrm>
-            <a:off x="822960" y="2834640"/>
-            <a:ext cx="10545775" cy="2194560"/>
+            <a:off x="822960" y="1938020"/>
+            <a:ext cx="10545775" cy="2292350"/>
           </a:xfrm>
           <a:prstGeom prst="rect">
             <a:avLst/>
@@ -4447,7 +4447,7 @@
         <p:spPr>
           <a:xfrm>
             <a:off x="822960" y="1188720"/>
-            <a:ext cx="10545775" cy="1645920"/>
+            <a:ext cx="10545775" cy="429260"/>
           </a:xfrm>
           <a:prstGeom prst="rect">
             <a:avLst/>
@@ -4485,8 +4485,8 @@
         </p:nvSpPr>
         <p:spPr>
           <a:xfrm>
-            <a:off x="822960" y="2834640"/>
-            <a:ext cx="10545775" cy="2194560"/>
+            <a:off x="822960" y="1938020"/>
+            <a:ext cx="10545775" cy="2292350"/>
           </a:xfrm>
           <a:prstGeom prst="rect">
             <a:avLst/>
@@ -4964,7 +4964,7 @@
         <p:spPr>
           <a:xfrm>
             <a:off x="822960" y="1188720"/>
-            <a:ext cx="10545775" cy="1645920"/>
+            <a:ext cx="10545775" cy="429260"/>
           </a:xfrm>
           <a:prstGeom prst="rect">
             <a:avLst/>
@@ -5002,7 +5002,7 @@
         </p:nvSpPr>
         <p:spPr>
           <a:xfrm>
-            <a:off x="822960" y="2834640"/>
+            <a:off x="822960" y="1938020"/>
             <a:ext cx="10545775" cy="1280160"/>
           </a:xfrm>
           <a:prstGeom prst="rect">
@@ -5480,7 +5480,7 @@
         <p:spPr>
           <a:xfrm>
             <a:off x="822960" y="1188720"/>
-            <a:ext cx="10545775" cy="1645920"/>
+            <a:ext cx="10545775" cy="429260"/>
           </a:xfrm>
           <a:prstGeom prst="rect">
             <a:avLst/>
@@ -5518,8 +5518,8 @@
         </p:nvSpPr>
         <p:spPr>
           <a:xfrm>
-            <a:off x="822960" y="2834640"/>
-            <a:ext cx="10545775" cy="2194560"/>
+            <a:off x="822960" y="1938020"/>
+            <a:ext cx="10545775" cy="1833880"/>
           </a:xfrm>
           <a:prstGeom prst="rect">
             <a:avLst/>
@@ -6620,7 +6620,7 @@
         <p:spPr>
           <a:xfrm>
             <a:off x="822960" y="1188720"/>
-            <a:ext cx="10545775" cy="1645920"/>
+            <a:ext cx="10545775" cy="429260"/>
           </a:xfrm>
           <a:prstGeom prst="rect">
             <a:avLst/>
@@ -6658,8 +6658,8 @@
         </p:nvSpPr>
         <p:spPr>
           <a:xfrm>
-            <a:off x="822960" y="2834640"/>
-            <a:ext cx="10545775" cy="2194560"/>
+            <a:off x="822960" y="1938020"/>
+            <a:ext cx="10545775" cy="916940"/>
           </a:xfrm>
           <a:prstGeom prst="rect">
             <a:avLst/>
@@ -7272,7 +7272,7 @@
         <p:spPr>
           <a:xfrm>
             <a:off x="822960" y="1188720"/>
-            <a:ext cx="10545775" cy="1645920"/>
+            <a:ext cx="10545775" cy="429260"/>
           </a:xfrm>
           <a:prstGeom prst="rect">
             <a:avLst/>
@@ -7310,8 +7310,8 @@
         </p:nvSpPr>
         <p:spPr>
           <a:xfrm>
-            <a:off x="822960" y="2834640"/>
-            <a:ext cx="10545775" cy="2194560"/>
+            <a:off x="822960" y="1938020"/>
+            <a:ext cx="10545775" cy="2292350"/>
           </a:xfrm>
           <a:prstGeom prst="rect">
             <a:avLst/>
@@ -7368,7 +7368,7 @@
                 </a:solidFill>
                 <a:latin typeface="Helvetica"/>
               </a:rPr>
-              <a:t>Ensembl's one2one label would silently delete serpinh1b — the single most</a:t>
+              <a:t>Ensembl's one2one label would silently delete serpinh1b — one of the most</a:t>
             </a:r>
           </a:p>
           <a:p>
@@ -7384,7 +7384,7 @@
                 </a:solidFill>
                 <a:latin typeface="Helvetica"/>
               </a:rPr>
-              <a:t>strongly induced gene in the experiment — and every other gene the teleost</a:t>
+              <a:t>convincing gene in the experiment — and every other gene the teleost</a:t>
             </a:r>
           </a:p>
           <a:p>
@@ -7413,7 +7413,7 @@
         </p:nvSpPr>
         <p:spPr>
           <a:xfrm>
-            <a:off x="822960" y="4572000"/>
+            <a:off x="822960" y="4504690"/>
             <a:ext cx="10545775" cy="1280160"/>
           </a:xfrm>
           <a:prstGeom prst="rect">
@@ -7439,7 +7439,7 @@
                 </a:solidFill>
                 <a:latin typeface="Menlo"/>
               </a:rPr>
-              <a:t>serpinh1b   log2FC +3.72   padj 1e-112</a:t>
+              <a:t>serpinh1b   log2FC +3.72   padj 1e-112   (3rd smallest padj of 354)</a:t>
             </a:r>
           </a:p>
         </p:txBody>

--- a/slides/S7_slides.pptx
+++ b/slides/S7_slides.pptx
@@ -5396,7 +5396,7 @@
                 </a:solidFill>
                 <a:latin typeface="Helvetica"/>
               </a:rPr>
-              <a:t>— Bone mineralization appears in 2023, vanishes, returns in 2026</a:t>
+              <a:t>— Bone mineralization: significant in 2021 and 2023, gone in 2025, back in 2026</a:t>
             </a:r>
           </a:p>
         </p:txBody>

--- a/slides/S7_slides.pptx
+++ b/slides/S7_slides.pptx
@@ -3405,7 +3405,7 @@
         <p:spPr>
           <a:xfrm>
             <a:off x="822960" y="3558540"/>
-            <a:ext cx="10545775" cy="1280160"/>
+            <a:ext cx="10545775" cy="561340"/>
           </a:xfrm>
           <a:prstGeom prst="rect">
             <a:avLst/>
@@ -3420,7 +3420,7 @@
           <a:p>
             <a:pPr algn="l">
               <a:spcAft>
-                <a:spcPts val="1000"/>
+                <a:spcPts val="0"/>
               </a:spcAft>
             </a:pPr>
             <a:r>
@@ -3436,7 +3436,7 @@
           <a:p>
             <a:pPr algn="l">
               <a:spcAft>
-                <a:spcPts val="1000"/>
+                <a:spcPts val="0"/>
               </a:spcAft>
             </a:pPr>
             <a:r>
@@ -5003,7 +5003,7 @@
         <p:spPr>
           <a:xfrm>
             <a:off x="822960" y="1938020"/>
-            <a:ext cx="10545775" cy="1280160"/>
+            <a:ext cx="10545775" cy="1403350"/>
           </a:xfrm>
           <a:prstGeom prst="rect">
             <a:avLst/>
@@ -5018,7 +5018,7 @@
           <a:p>
             <a:pPr algn="l">
               <a:spcAft>
-                <a:spcPts val="1000"/>
+                <a:spcPts val="0"/>
               </a:spcAft>
             </a:pPr>
             <a:r>
@@ -5034,7 +5034,7 @@
           <a:p>
             <a:pPr algn="l">
               <a:spcAft>
-                <a:spcPts val="1000"/>
+                <a:spcPts val="0"/>
               </a:spcAft>
             </a:pPr>
             <a:r>
@@ -5050,7 +5050,7 @@
           <a:p>
             <a:pPr algn="l">
               <a:spcAft>
-                <a:spcPts val="1000"/>
+                <a:spcPts val="0"/>
               </a:spcAft>
             </a:pPr>
             <a:r>
@@ -5066,7 +5066,7 @@
           <a:p>
             <a:pPr algn="l">
               <a:spcAft>
-                <a:spcPts val="1000"/>
+                <a:spcPts val="0"/>
               </a:spcAft>
             </a:pPr>
             <a:r>
@@ -5082,7 +5082,7 @@
           <a:p>
             <a:pPr algn="l">
               <a:spcAft>
-                <a:spcPts val="1000"/>
+                <a:spcPts val="0"/>
               </a:spcAft>
             </a:pPr>
             <a:r>
@@ -7384,7 +7384,7 @@
                 </a:solidFill>
                 <a:latin typeface="Helvetica"/>
               </a:rPr>
-              <a:t>convincing gene in the experiment — and every other gene the teleost</a:t>
+              <a:t>convincing genes in the experiment — and every other gene the teleost</a:t>
             </a:r>
           </a:p>
           <a:p>
@@ -7414,7 +7414,7 @@
         <p:spPr>
           <a:xfrm>
             <a:off x="822960" y="4504690"/>
-            <a:ext cx="10545775" cy="1280160"/>
+            <a:ext cx="10545775" cy="280670"/>
           </a:xfrm>
           <a:prstGeom prst="rect">
             <a:avLst/>
@@ -7429,7 +7429,7 @@
           <a:p>
             <a:pPr algn="l">
               <a:spcAft>
-                <a:spcPts val="1000"/>
+                <a:spcPts val="0"/>
               </a:spcAft>
             </a:pPr>
             <a:r>
